--- a/modulo-2/PF1822-desarrollo-con-ia/produccion/videos/AE4-capsula.pptx
+++ b/modulo-2/PF1822-desarrollo-con-ia/produccion/videos/AE4-capsula.pptx
@@ -18,6 +18,7 @@
     <p:sldId id="263" r:id="rId17"/>
     <p:sldId id="264" r:id="rId18"/>
     <p:sldId id="265" r:id="rId19"/>
+    <p:sldId id="266" r:id="rId20"/>
   </p:sldIdLst>
   <p:sldSz cx="12192000" cy="6858000"/>
   <p:notesSz cx="6858000" cy="9144000"/>
@@ -161,7 +162,7 @@
           <a:p>
             <a:r>
               <a:rPr lang="es-CL" dirty="0"/>
-              <a:t>Te doy la bienvenida a la cápsula 4 del módulo 2: Preparar y medir texto. "Basura entra, basura sale: limpiar antes, medir después".</a:t>
+              <a:t>Te doy la bienvenida a la cápsula 4 del módulo 2, Introducción a modelos generativos y consumo por API: Preparar y medir texto. "Basura entra, basura sale: limpiar antes, medir después".</a:t>
             </a:r>
           </a:p>
         </p:txBody>
@@ -220,6 +221,65 @@
           <a:p>
             <a:r>
               <a:rPr lang="es-CL" dirty="0"/>
+              <a:t>Registrar y ajustar. Una fila por prueba en un CSV; identificar ajustes a partir de los números.</a:t>
+            </a:r>
+          </a:p>
+        </p:txBody>
+      </p:sp>
+    </p:spTree>
+  </p:cSld>
+  <p:clrMapOvr>
+    <a:masterClrMapping/>
+  </p:clrMapOvr>
+</p:notes>
+</file>
+
+<file path=ppt/notesSlides/notesSlide11.xml><?xml version="1.0" encoding="utf-8"?>
+<p:notes xmlns:a="http://schemas.openxmlformats.org/drawingml/2006/main" xmlns:r="http://schemas.openxmlformats.org/officeDocument/2006/relationships" xmlns:p="http://schemas.openxmlformats.org/presentationml/2006/main">
+  <p:cSld>
+    <p:spTree>
+      <p:nvGrpSpPr>
+        <p:cNvPr id="1" name=""/>
+        <p:cNvGrpSpPr/>
+        <p:nvPr/>
+      </p:nvGrpSpPr>
+      <p:grpSpPr>
+        <a:xfrm>
+          <a:off x="0" y="0"/>
+          <a:ext cx="0" cy="0"/>
+          <a:chOff x="0" y="0"/>
+          <a:chExt cx="0" cy="0"/>
+        </a:xfrm>
+      </p:grpSpPr>
+      <p:sp>
+        <p:nvSpPr>
+          <p:cNvPr id="2" name="Imagen de diapositiva"/>
+          <p:cNvSpPr>
+            <a:spLocks noGrp="1" noRot="1" noChangeAspect="1"/>
+          </p:cNvSpPr>
+          <p:nvPr>
+            <p:ph type="sldImg"/>
+          </p:nvPr>
+        </p:nvSpPr>
+        <p:spPr/>
+      </p:sp>
+      <p:sp>
+        <p:nvSpPr>
+          <p:cNvPr id="3" name="Notas"/>
+          <p:cNvSpPr>
+            <a:spLocks noGrp="1"/>
+          </p:cNvSpPr>
+          <p:nvPr>
+            <p:ph type="body" idx="1"/>
+          </p:nvPr>
+        </p:nvSpPr>
+        <p:spPr/>
+        <p:txBody>
+          <a:bodyPr/>
+          <a:lstStyle/>
+          <a:p>
+            <a:r>
+              <a:rPr lang="es-CL" dirty="0"/>
               <a:t>Tu tarea. Actividad 2, pasos 1, 4 y 5.</a:t>
             </a:r>
           </a:p>
@@ -279,7 +339,7 @@
           <a:p>
             <a:r>
               <a:rPr lang="es-CL" dirty="0"/>
-              <a:t>Conceptos básicos de NLP. Token (unidad que procesa el modelo), palabra, lema (forma de diccionario), stopwords (palabras frecuentes con poco contenido), n-gramas (secuencias de n tokens).</a:t>
+              <a:t>Esta cápsula corresponde al aprendizaje esperado 4 del plan formativo: Implementar un pipeline de preprocesamiento y evaluación básica de texto en Python, aplicando técnicas de limpieza, normalización y métricas iniciales de calidad, de acuerdo con los requisitos de entrada y salida del modelo. Sus criterios de evaluación son: Explica los conceptos fundamentales de NLP y evaluación básica de respuestas, considerando token, lema, stopwords, n-gramas, coherencia y relevancia. Codifica una rutina en Python para la limpieza de texto, tokenización y normalización sobre un corpus de documentos, de acuerdo con buenas prácticas. Calcula métricas básicas de calidad de respuestas generadas, considerando coherencia, relevancia, BLEU y ROUGE, registrando los resultados obtenidos de acuerdo con un protocolo definido.</a:t>
             </a:r>
           </a:p>
         </p:txBody>
@@ -338,7 +398,7 @@
           <a:p>
             <a:r>
               <a:rPr lang="es-CL" dirty="0"/>
-              <a:t>Limpieza. Quitar HTML, caracteres especiales, firmas y ruido; reemplazar correos y enlaces por marcas. Cuidado con no borrar el problema que reporta el ticket.</a:t>
+              <a:t>Conceptos básicos de NLP. Token (unidad que procesa el modelo), palabra, lema (forma de diccionario), stopwords (palabras frecuentes con poco contenido), n-gramas (secuencias de n tokens).</a:t>
             </a:r>
           </a:p>
         </p:txBody>
@@ -397,7 +457,7 @@
           <a:p>
             <a:r>
               <a:rPr lang="es-CL" dirty="0"/>
-              <a:t>Normalización. Mayúsculas y minúsculas, espacios, estandarización de texto; tildes solo para comparar al medir.</a:t>
+              <a:t>Limpieza. Quitar HTML, caracteres especiales, firmas y ruido; reemplazar correos y enlaces por marcas. Cuidado con no borrar el problema que reporta el ticket.</a:t>
             </a:r>
           </a:p>
         </p:txBody>
@@ -456,7 +516,7 @@
           <a:p>
             <a:r>
               <a:rPr lang="es-CL" dirty="0"/>
-              <a:t>Tokenizar, lematizar, stemming. spaCy (es_core_news_sm) y NLTK. Lematizar: "corriendo", luego "correr"; stemming: recorta la raíz.</a:t>
+              <a:t>Normalización. Mayúsculas y minúsculas, espacios, estandarización de texto; tildes solo para comparar al medir.</a:t>
             </a:r>
           </a:p>
         </p:txBody>
@@ -515,7 +575,7 @@
           <a:p>
             <a:r>
               <a:rPr lang="es-CL" dirty="0"/>
-              <a:t>Vectorización básica. CountVectorizer y TF-IDF de scikit-learn: representar textos como números para compararlos.</a:t>
+              <a:t>Tokenizar, lematizar, stemming. spaCy (es core news sm) y NLTK. Lematizar: "corriendo", luego "correr"; stemming: recorta la raíz.</a:t>
             </a:r>
           </a:p>
         </p:txBody>
@@ -574,7 +634,7 @@
           <a:p>
             <a:r>
               <a:rPr lang="es-CL" dirty="0"/>
-              <a:t>Un pipeline modular. Funciones reutilizables por etapa (limpiar, tokenizar, ngramas, medir) que se encadenan y se prueban por separado.</a:t>
+              <a:t>Vectorización básica. CountVectorizer y TF-IDF de scikit-learn: representar textos como números para compararlos.</a:t>
             </a:r>
           </a:p>
         </p:txBody>
@@ -633,7 +693,7 @@
           <a:p>
             <a:r>
               <a:rPr lang="es-CL" dirty="0"/>
-              <a:t>Métricas de calidad. ROUGE (cuánto de la referencia aparece en el resumen), BLEU (cuánto del resumen aparece en la referencia, con penalización por largo), coherencia y relevancia con pauta humana. En español, usar un tokenizador que respete las tildes.</a:t>
+              <a:t>Un pipeline modular. Funciones reutilizables por etapa (limpiar, tokenizar, ngramas, medir) que se encadenan y se prueban por separado.</a:t>
             </a:r>
           </a:p>
         </p:txBody>
@@ -692,7 +752,7 @@
           <a:p>
             <a:r>
               <a:rPr lang="es-CL" dirty="0"/>
-              <a:t>Registrar y ajustar. Una fila por prueba en un CSV; identificar ajustes a partir de los números.</a:t>
+              <a:t>Métricas de calidad. ROUGE (cuánto de la referencia aparece en el resumen), BLEU (cuánto del resumen aparece en la referencia, con penalización por largo), coherencia y relevancia con pauta humana. En español, usar un tokenizador que respete las tildes.</a:t>
             </a:r>
           </a:p>
         </p:txBody>
@@ -841,6 +901,39 @@
       </p:sp>
       <p:sp>
         <p:nvSpPr>
+          <p:cNvPr id="7" name="Etiqueta"/>
+          <p:cNvSpPr txBox="1"/>
+          <p:nvPr/>
+        </p:nvSpPr>
+        <p:spPr>
+          <a:xfrm>
+            <a:off x="609600" y="609600"/>
+            <a:ext cx="7315200" cy="533400"/>
+          </a:xfrm>
+          <a:prstGeom prst="rect">
+            <a:avLst/>
+          </a:prstGeom>
+          <a:noFill/>
+        </p:spPr>
+        <p:txBody>
+          <a:bodyPr wrap="square" lIns="0" rIns="0" anchor="b">
+            <a:normAutofit/>
+          </a:bodyPr>
+          <a:lstStyle/>
+          <a:p>
+            <a:r>
+              <a:rPr lang="es-CL" sz="1200" b="1" dirty="0">
+                <a:solidFill>
+                  <a:srgbClr val="9FC3E6"/>
+                </a:solidFill>
+              </a:rPr>
+              <a:t>MÓDULO 2 · INTRODUCCIÓN A MODELOS GENERATIVOS Y CONSUMO POR API</a:t>
+            </a:r>
+          </a:p>
+        </p:txBody>
+      </p:sp>
+      <p:sp>
+        <p:nvSpPr>
           <p:cNvPr id="4" name="Título"/>
           <p:cNvSpPr txBox="1"/>
           <p:nvPr/>
@@ -903,6 +996,16 @@
               <a:t>"Basura entra, basura sale: limpiar antes, medir después".</a:t>
             </a:r>
           </a:p>
+          <a:p>
+            <a:r>
+              <a:rPr lang="es-CL" sz="2200" dirty="0">
+                <a:solidFill>
+                  <a:srgbClr val="E5E7EB"/>
+                </a:solidFill>
+              </a:rPr>
+              <a:t>Contenido del plan: 4. PIPELINE DE PREPROCESAMIENTO Y EVALUACIÓN BÁSICA DE TEXTO</a:t>
+            </a:r>
+          </a:p>
         </p:txBody>
       </p:sp>
       <p:sp>
@@ -933,7 +1036,7 @@
                   <a:srgbClr val="CBD5E1"/>
                 </a:solidFill>
               </a:rPr>
-              <a:t>PF1822 · Módulo 2 · Cápsula 4 · AE4</a:t>
+              <a:t>PF1822 · Módulo 2 · Cápsula 4 · Aprendizaje esperado 4</a:t>
             </a:r>
           </a:p>
         </p:txBody>
@@ -987,14 +1090,67 @@
       </p:sp>
       <p:sp>
         <p:nvSpPr>
+          <p:cNvPr id="7" name="Etiqueta"/>
+          <p:cNvSpPr txBox="1"/>
+          <p:nvPr/>
+        </p:nvSpPr>
+        <p:spPr>
+          <a:xfrm>
+            <a:off x="609600" y="228600"/>
+            <a:ext cx="7315200" cy="914400"/>
+          </a:xfrm>
+          <a:prstGeom prst="rect">
+            <a:avLst/>
+          </a:prstGeom>
+          <a:noFill/>
+        </p:spPr>
+        <p:txBody>
+          <a:bodyPr wrap="square" lIns="0" rIns="0" anchor="b">
+            <a:normAutofit/>
+          </a:bodyPr>
+          <a:lstStyle/>
+          <a:p>
+            <a:r>
+              <a:rPr lang="es-CL" sz="1200" b="1" dirty="0">
+                <a:solidFill>
+                  <a:srgbClr val="0E7490"/>
+                </a:solidFill>
+              </a:rPr>
+              <a:t>CONTENIDO DEL PLAN (TEXTUAL)</a:t>
+            </a:r>
+          </a:p>
+          <a:p>
+            <a:r>
+              <a:rPr lang="es-CL" sz="1200" b="1" dirty="0">
+                <a:solidFill>
+                  <a:srgbClr val="0F3D5E"/>
+                </a:solidFill>
+              </a:rPr>
+              <a:t>REGISTRO DE RESULTADOS DE EVALUACIÓN.</a:t>
+            </a:r>
+          </a:p>
+          <a:p>
+            <a:r>
+              <a:rPr lang="es-CL" sz="1200" b="1" dirty="0">
+                <a:solidFill>
+                  <a:srgbClr val="0F3D5E"/>
+                </a:solidFill>
+              </a:rPr>
+              <a:t>IDENTIFICACIÓN DE AJUSTES INICIALES A PARTIR DE MÉTRICAS OBTENIDAS.</a:t>
+            </a:r>
+          </a:p>
+        </p:txBody>
+      </p:sp>
+      <p:sp>
+        <p:nvSpPr>
           <p:cNvPr id="3" name="Título"/>
           <p:cNvSpPr txBox="1"/>
           <p:nvPr/>
         </p:nvSpPr>
         <p:spPr>
           <a:xfrm>
-            <a:off x="609600" y="381000"/>
-            <a:ext cx="7315200" cy="990600"/>
+            <a:off x="609600" y="1181100"/>
+            <a:ext cx="7315200" cy="685800"/>
           </a:xfrm>
           <a:prstGeom prst="rect">
             <a:avLst/>
@@ -1008,12 +1164,12 @@
           <a:lstStyle/>
           <a:p>
             <a:r>
-              <a:rPr lang="es-CL" sz="3200" b="1" dirty="0">
+              <a:rPr lang="es-CL" sz="2800" b="1" dirty="0">
                 <a:solidFill>
                   <a:srgbClr val="0F3D5E"/>
                 </a:solidFill>
               </a:rPr>
-              <a:t>Tu tarea</a:t>
+              <a:t>Registrar y ajustar</a:t>
             </a:r>
           </a:p>
         </p:txBody>
@@ -1026,7 +1182,7 @@
         </p:nvSpPr>
         <p:spPr>
           <a:xfrm>
-            <a:off x="609600" y="1447800"/>
+            <a:off x="609600" y="1943100"/>
             <a:ext cx="1066800" cy="50800"/>
           </a:xfrm>
           <a:prstGeom prst="rect">
@@ -1048,8 +1204,8 @@
         </p:nvSpPr>
         <p:spPr>
           <a:xfrm>
-            <a:off x="609600" y="1676400"/>
-            <a:ext cx="7315200" cy="4419600"/>
+            <a:off x="609600" y="2095500"/>
+            <a:ext cx="7315200" cy="4000500"/>
           </a:xfrm>
           <a:prstGeom prst="rect">
             <a:avLst/>
@@ -1078,7 +1234,7 @@
                   <a:srgbClr val="1F2937"/>
                 </a:solidFill>
               </a:rPr>
-              <a:t>Actividad 2, pasos 1, 4 y 5.</a:t>
+              <a:t>Una fila por prueba en un CSV; identificar ajustes a partir de los números.</a:t>
             </a:r>
           </a:p>
         </p:txBody>
@@ -1111,7 +1267,218 @@
                   <a:srgbClr val="6B7280"/>
                 </a:solidFill>
               </a:rPr>
-              <a:t>PF1822 · Módulo 2 · Cápsula 4 · AE4</a:t>
+              <a:t>PF1822 · Módulo 2 · Cápsula 4 · Aprendizaje esperado 4</a:t>
+            </a:r>
+          </a:p>
+        </p:txBody>
+      </p:sp>
+    </p:spTree>
+  </p:cSld>
+  <p:clrMapOvr>
+    <a:masterClrMapping/>
+  </p:clrMapOvr>
+</p:sld>
+</file>
+
+<file path=ppt/slides/slide11.xml><?xml version="1.0" encoding="utf-8"?>
+<p:sld xmlns:a="http://schemas.openxmlformats.org/drawingml/2006/main" xmlns:r="http://schemas.openxmlformats.org/officeDocument/2006/relationships" xmlns:p="http://schemas.openxmlformats.org/presentationml/2006/main">
+  <p:cSld>
+    <p:spTree>
+      <p:nvGrpSpPr>
+        <p:cNvPr id="1" name=""/>
+        <p:cNvGrpSpPr/>
+        <p:nvPr/>
+      </p:nvGrpSpPr>
+      <p:grpSpPr>
+        <a:xfrm>
+          <a:off x="0" y="0"/>
+          <a:ext cx="0" cy="0"/>
+          <a:chOff x="0" y="0"/>
+          <a:chExt cx="0" cy="0"/>
+        </a:xfrm>
+      </p:grpSpPr>
+      <p:sp>
+        <p:nvSpPr>
+          <p:cNvPr id="2" name="Franja 2"/>
+          <p:cNvSpPr/>
+          <p:nvPr/>
+        </p:nvSpPr>
+        <p:spPr>
+          <a:xfrm>
+            <a:off x="0" y="0"/>
+            <a:ext cx="12192000" cy="152400"/>
+          </a:xfrm>
+          <a:prstGeom prst="rect">
+            <a:avLst/>
+          </a:prstGeom>
+          <a:solidFill>
+            <a:srgbClr val="0E7490"/>
+          </a:solidFill>
+          <a:ln>
+            <a:noFill/>
+          </a:ln>
+        </p:spPr>
+      </p:sp>
+      <p:sp>
+        <p:nvSpPr>
+          <p:cNvPr id="7" name="Etiqueta"/>
+          <p:cNvSpPr txBox="1"/>
+          <p:nvPr/>
+        </p:nvSpPr>
+        <p:spPr>
+          <a:xfrm>
+            <a:off x="609600" y="228600"/>
+            <a:ext cx="7315200" cy="914400"/>
+          </a:xfrm>
+          <a:prstGeom prst="rect">
+            <a:avLst/>
+          </a:prstGeom>
+          <a:noFill/>
+        </p:spPr>
+        <p:txBody>
+          <a:bodyPr wrap="square" lIns="0" rIns="0" anchor="b">
+            <a:normAutofit/>
+          </a:bodyPr>
+          <a:lstStyle/>
+          <a:p>
+            <a:r>
+              <a:rPr lang="es-CL" sz="1200" b="1" dirty="0">
+                <a:solidFill>
+                  <a:srgbClr val="0E7490"/>
+                </a:solidFill>
+              </a:rPr>
+              <a:t>PRÁCTICA DEL APRENDIZAJE ESPERADO 4</a:t>
+            </a:r>
+          </a:p>
+        </p:txBody>
+      </p:sp>
+      <p:sp>
+        <p:nvSpPr>
+          <p:cNvPr id="3" name="Título"/>
+          <p:cNvSpPr txBox="1"/>
+          <p:nvPr/>
+        </p:nvSpPr>
+        <p:spPr>
+          <a:xfrm>
+            <a:off x="609600" y="1181100"/>
+            <a:ext cx="7315200" cy="685800"/>
+          </a:xfrm>
+          <a:prstGeom prst="rect">
+            <a:avLst/>
+          </a:prstGeom>
+          <a:noFill/>
+        </p:spPr>
+        <p:txBody>
+          <a:bodyPr wrap="square" lIns="0" rIns="0" anchor="b">
+            <a:normAutofit/>
+          </a:bodyPr>
+          <a:lstStyle/>
+          <a:p>
+            <a:r>
+              <a:rPr lang="es-CL" sz="2800" b="1" dirty="0">
+                <a:solidFill>
+                  <a:srgbClr val="0F3D5E"/>
+                </a:solidFill>
+              </a:rPr>
+              <a:t>Tu tarea</a:t>
+            </a:r>
+          </a:p>
+        </p:txBody>
+      </p:sp>
+      <p:sp>
+        <p:nvSpPr>
+          <p:cNvPr id="4" name="Franja 4"/>
+          <p:cNvSpPr/>
+          <p:nvPr/>
+        </p:nvSpPr>
+        <p:spPr>
+          <a:xfrm>
+            <a:off x="609600" y="1943100"/>
+            <a:ext cx="1066800" cy="50800"/>
+          </a:xfrm>
+          <a:prstGeom prst="rect">
+            <a:avLst/>
+          </a:prstGeom>
+          <a:solidFill>
+            <a:srgbClr val="F59E0B"/>
+          </a:solidFill>
+          <a:ln>
+            <a:noFill/>
+          </a:ln>
+        </p:spPr>
+      </p:sp>
+      <p:sp>
+        <p:nvSpPr>
+          <p:cNvPr id="5" name="Contenido"/>
+          <p:cNvSpPr txBox="1"/>
+          <p:nvPr/>
+        </p:nvSpPr>
+        <p:spPr>
+          <a:xfrm>
+            <a:off x="609600" y="2095500"/>
+            <a:ext cx="7315200" cy="4000500"/>
+          </a:xfrm>
+          <a:prstGeom prst="rect">
+            <a:avLst/>
+          </a:prstGeom>
+          <a:noFill/>
+        </p:spPr>
+        <p:txBody>
+          <a:bodyPr wrap="square" lIns="0" rIns="0" anchor="t">
+            <a:normAutofit/>
+          </a:bodyPr>
+          <a:lstStyle/>
+          <a:p>
+            <a:pPr marL="342900" indent="-342900">
+              <a:spcBef>
+                <a:spcPts val="900"/>
+              </a:spcBef>
+              <a:buClr>
+                <a:srgbClr val="0E7490"/>
+              </a:buClr>
+              <a:buFont typeface="Arial"/>
+              <a:buChar char="•"/>
+            </a:pPr>
+            <a:r>
+              <a:rPr lang="es-CL" sz="2400" dirty="0">
+                <a:solidFill>
+                  <a:srgbClr val="1F2937"/>
+                </a:solidFill>
+              </a:rPr>
+              <a:t>Actividad 2, pasos 1, 4 y 5.</a:t>
+            </a:r>
+          </a:p>
+        </p:txBody>
+      </p:sp>
+      <p:sp>
+        <p:nvSpPr>
+          <p:cNvPr id="6" name="Pie"/>
+          <p:cNvSpPr txBox="1"/>
+          <p:nvPr/>
+        </p:nvSpPr>
+        <p:spPr>
+          <a:xfrm>
+            <a:off x="609600" y="6248400"/>
+            <a:ext cx="7315200" cy="381000"/>
+          </a:xfrm>
+          <a:prstGeom prst="rect">
+            <a:avLst/>
+          </a:prstGeom>
+          <a:noFill/>
+        </p:spPr>
+        <p:txBody>
+          <a:bodyPr wrap="square" lIns="0" rIns="0" anchor="t">
+            <a:normAutofit/>
+          </a:bodyPr>
+          <a:lstStyle/>
+          <a:p>
+            <a:r>
+              <a:rPr lang="es-CL" sz="1200" dirty="0">
+                <a:solidFill>
+                  <a:srgbClr val="6B7280"/>
+                </a:solidFill>
+              </a:rPr>
+              <a:t>PF1822 · Módulo 2 · Cápsula 4 · Aprendizaje esperado 4</a:t>
             </a:r>
           </a:p>
         </p:txBody>
@@ -1165,14 +1532,47 @@
       </p:sp>
       <p:sp>
         <p:nvSpPr>
+          <p:cNvPr id="7" name="Etiqueta"/>
+          <p:cNvSpPr txBox="1"/>
+          <p:nvPr/>
+        </p:nvSpPr>
+        <p:spPr>
+          <a:xfrm>
+            <a:off x="609600" y="228600"/>
+            <a:ext cx="7315200" cy="914400"/>
+          </a:xfrm>
+          <a:prstGeom prst="rect">
+            <a:avLst/>
+          </a:prstGeom>
+          <a:noFill/>
+        </p:spPr>
+        <p:txBody>
+          <a:bodyPr wrap="square" lIns="0" rIns="0" anchor="b">
+            <a:normAutofit/>
+          </a:bodyPr>
+          <a:lstStyle/>
+          <a:p>
+            <a:r>
+              <a:rPr lang="es-CL" sz="1200" b="1" dirty="0">
+                <a:solidFill>
+                  <a:srgbClr val="0E7490"/>
+                </a:solidFill>
+              </a:rPr>
+              <a:t>APRENDIZAJE Y CRITERIOS TEXTUALES DEL PLAN FORMATIVO</a:t>
+            </a:r>
+          </a:p>
+        </p:txBody>
+      </p:sp>
+      <p:sp>
+        <p:nvSpPr>
           <p:cNvPr id="3" name="Título"/>
           <p:cNvSpPr txBox="1"/>
           <p:nvPr/>
         </p:nvSpPr>
         <p:spPr>
           <a:xfrm>
-            <a:off x="609600" y="381000"/>
-            <a:ext cx="7315200" cy="990600"/>
+            <a:off x="609600" y="1181100"/>
+            <a:ext cx="7315200" cy="685800"/>
           </a:xfrm>
           <a:prstGeom prst="rect">
             <a:avLst/>
@@ -1186,12 +1586,12 @@
           <a:lstStyle/>
           <a:p>
             <a:r>
-              <a:rPr lang="es-CL" sz="3200" b="1" dirty="0">
+              <a:rPr lang="es-CL" sz="2800" b="1" dirty="0">
                 <a:solidFill>
                   <a:srgbClr val="0F3D5E"/>
                 </a:solidFill>
               </a:rPr>
-              <a:t>Conceptos básicos de NLP</a:t>
+              <a:t>Aprendizaje esperado 4</a:t>
             </a:r>
           </a:p>
         </p:txBody>
@@ -1204,7 +1604,7 @@
         </p:nvSpPr>
         <p:spPr>
           <a:xfrm>
-            <a:off x="609600" y="1447800"/>
+            <a:off x="609600" y="1943100"/>
             <a:ext cx="1066800" cy="50800"/>
           </a:xfrm>
           <a:prstGeom prst="rect">
@@ -1226,8 +1626,8 @@
         </p:nvSpPr>
         <p:spPr>
           <a:xfrm>
-            <a:off x="609600" y="1676400"/>
-            <a:ext cx="7315200" cy="4419600"/>
+            <a:off x="609600" y="2095500"/>
+            <a:ext cx="7315200" cy="4000500"/>
           </a:xfrm>
           <a:prstGeom prst="rect">
             <a:avLst/>
@@ -1251,68 +1651,88 @@
               <a:buChar char="•"/>
             </a:pPr>
             <a:r>
-              <a:rPr lang="es-CL" sz="2400" b="1" dirty="0">
+              <a:rPr lang="es-CL" sz="1300" b="1" dirty="0">
                 <a:solidFill>
                   <a:srgbClr val="1F2937"/>
                 </a:solidFill>
               </a:rPr>
-              <a:t>Token</a:t>
-            </a:r>
-            <a:r>
-              <a:rPr lang="es-CL" sz="2400" dirty="0">
+              <a:t>IMPLEMENTAR UN PIPELINE DE PREPROCESAMIENTO Y EVALUACIÓN BÁSICA DE TEXTO EN PYTHON, APLICANDO TÉCNICAS DE LIMPIEZA, NORMALIZACIÓN Y MÉTRICAS INICIALES DE CALIDAD, DE ACUERDO CON LOS REQUISITOS DE ENTRADA Y SALIDA DEL MODELO.</a:t>
+            </a:r>
+          </a:p>
+          <a:p>
+            <a:pPr marL="0" indent="0">
+              <a:spcBef>
+                <a:spcPts val="1400"/>
+              </a:spcBef>
+              <a:buNone/>
+            </a:pPr>
+            <a:r>
+              <a:rPr lang="es-CL" sz="1100" b="1" dirty="0">
+                <a:solidFill>
+                  <a:srgbClr val="0E7490"/>
+                </a:solidFill>
+              </a:rPr>
+              <a:t>CRITERIOS DE EVALUACIÓN</a:t>
+            </a:r>
+          </a:p>
+          <a:p>
+            <a:pPr marL="342900" indent="-342900">
+              <a:spcBef>
+                <a:spcPts val="900"/>
+              </a:spcBef>
+              <a:buClr>
+                <a:srgbClr val="0E7490"/>
+              </a:buClr>
+              <a:buFont typeface="Arial"/>
+              <a:buChar char="•"/>
+            </a:pPr>
+            <a:r>
+              <a:rPr lang="es-CL" sz="1300" dirty="0">
                 <a:solidFill>
                   <a:srgbClr val="1F2937"/>
                 </a:solidFill>
               </a:rPr>
-              <a:t> (unidad que procesa el modelo), palabra, </a:t>
-            </a:r>
-            <a:r>
-              <a:rPr lang="es-CL" sz="2400" b="1" dirty="0">
+              <a:t>4.1 EXPLICA LOS CONCEPTOS FUNDAMENTALES DE NLP Y EVALUACIÓN BÁSICA DE RESPUESTAS, CONSIDERANDO TOKEN, LEMA, STOPWORDS, N-GRAMAS, COHERENCIA Y RELEVANCIA.</a:t>
+            </a:r>
+          </a:p>
+          <a:p>
+            <a:pPr marL="342900" indent="-342900">
+              <a:spcBef>
+                <a:spcPts val="900"/>
+              </a:spcBef>
+              <a:buClr>
+                <a:srgbClr val="0E7490"/>
+              </a:buClr>
+              <a:buFont typeface="Arial"/>
+              <a:buChar char="•"/>
+            </a:pPr>
+            <a:r>
+              <a:rPr lang="es-CL" sz="1300" dirty="0">
                 <a:solidFill>
                   <a:srgbClr val="1F2937"/>
                 </a:solidFill>
               </a:rPr>
-              <a:t>lema</a:t>
-            </a:r>
-            <a:r>
-              <a:rPr lang="es-CL" sz="2400" dirty="0">
+              <a:t>4.2 CODIFICA UNA RUTINA EN PYTHON PARA LA LIMPIEZA DE TEXTO, TOKENIZACIÓN Y NORMALIZACIÓN SOBRE UN CORPUS DE DOCUMENTOS, DE ACUERDO CON BUENAS PRÁCTICAS.</a:t>
+            </a:r>
+          </a:p>
+          <a:p>
+            <a:pPr marL="342900" indent="-342900">
+              <a:spcBef>
+                <a:spcPts val="900"/>
+              </a:spcBef>
+              <a:buClr>
+                <a:srgbClr val="0E7490"/>
+              </a:buClr>
+              <a:buFont typeface="Arial"/>
+              <a:buChar char="•"/>
+            </a:pPr>
+            <a:r>
+              <a:rPr lang="es-CL" sz="1300" dirty="0">
                 <a:solidFill>
                   <a:srgbClr val="1F2937"/>
                 </a:solidFill>
               </a:rPr>
-              <a:t> (forma de diccionario), </a:t>
-            </a:r>
-            <a:r>
-              <a:rPr lang="es-CL" sz="2400" b="1" dirty="0">
-                <a:solidFill>
-                  <a:srgbClr val="1F2937"/>
-                </a:solidFill>
-              </a:rPr>
-              <a:t>stopwords</a:t>
-            </a:r>
-            <a:r>
-              <a:rPr lang="es-CL" sz="2400" dirty="0">
-                <a:solidFill>
-                  <a:srgbClr val="1F2937"/>
-                </a:solidFill>
-              </a:rPr>
-              <a:t> (palabras frecuentes con poco contenido), </a:t>
-            </a:r>
-            <a:r>
-              <a:rPr lang="es-CL" sz="2400" b="1" dirty="0">
-                <a:solidFill>
-                  <a:srgbClr val="1F2937"/>
-                </a:solidFill>
-              </a:rPr>
-              <a:t>n-gramas</a:t>
-            </a:r>
-            <a:r>
-              <a:rPr lang="es-CL" sz="2400" dirty="0">
-                <a:solidFill>
-                  <a:srgbClr val="1F2937"/>
-                </a:solidFill>
-              </a:rPr>
-              <a:t> (secuencias de n tokens).</a:t>
+              <a:t>4.3 CALCULA MÉTRICAS BÁSICAS DE CALIDAD DE RESPUESTAS GENERADAS, CONSIDERANDO COHERENCIA, RELEVANCIA, BLEU Y ROUGE, REGISTRANDO LOS RESULTADOS OBTENIDOS DE ACUERDO CON UN PROTOCOLO DEFINIDO.</a:t>
             </a:r>
           </a:p>
         </p:txBody>
@@ -1345,7 +1765,7 @@
                   <a:srgbClr val="6B7280"/>
                 </a:solidFill>
               </a:rPr>
-              <a:t>PF1822 · Módulo 2 · Cápsula 4 · AE4</a:t>
+              <a:t>PF1822 · Módulo 2 · Cápsula 4 · Aprendizaje esperado 4</a:t>
             </a:r>
           </a:p>
         </p:txBody>
@@ -1399,14 +1819,57 @@
       </p:sp>
       <p:sp>
         <p:nvSpPr>
+          <p:cNvPr id="7" name="Etiqueta"/>
+          <p:cNvSpPr txBox="1"/>
+          <p:nvPr/>
+        </p:nvSpPr>
+        <p:spPr>
+          <a:xfrm>
+            <a:off x="609600" y="228600"/>
+            <a:ext cx="7315200" cy="914400"/>
+          </a:xfrm>
+          <a:prstGeom prst="rect">
+            <a:avLst/>
+          </a:prstGeom>
+          <a:noFill/>
+        </p:spPr>
+        <p:txBody>
+          <a:bodyPr wrap="square" lIns="0" rIns="0" anchor="b">
+            <a:normAutofit/>
+          </a:bodyPr>
+          <a:lstStyle/>
+          <a:p>
+            <a:r>
+              <a:rPr lang="es-CL" sz="1200" b="1" dirty="0">
+                <a:solidFill>
+                  <a:srgbClr val="0E7490"/>
+                </a:solidFill>
+              </a:rPr>
+              <a:t>CONTENIDO DEL PLAN (TEXTUAL)</a:t>
+            </a:r>
+          </a:p>
+          <a:p>
+            <a:r>
+              <a:rPr lang="es-CL" sz="1200" b="1" dirty="0">
+                <a:solidFill>
+                  <a:srgbClr val="0F3D5E"/>
+                </a:solidFill>
+              </a:rPr>
+              <a:t>CONCEPTOS BÁSICOS DE NLP: TOKEN, PALABRA, LEMA, STOPWORDS Y N-GRAMAS.</a:t>
+            </a:r>
+          </a:p>
+        </p:txBody>
+      </p:sp>
+      <p:sp>
+        <p:nvSpPr>
           <p:cNvPr id="3" name="Título"/>
           <p:cNvSpPr txBox="1"/>
           <p:nvPr/>
         </p:nvSpPr>
         <p:spPr>
           <a:xfrm>
-            <a:off x="609600" y="381000"/>
-            <a:ext cx="7315200" cy="990600"/>
+            <a:off x="609600" y="1181100"/>
+            <a:ext cx="7315200" cy="685800"/>
           </a:xfrm>
           <a:prstGeom prst="rect">
             <a:avLst/>
@@ -1420,12 +1883,12 @@
           <a:lstStyle/>
           <a:p>
             <a:r>
-              <a:rPr lang="es-CL" sz="3200" b="1" dirty="0">
+              <a:rPr lang="es-CL" sz="2800" b="1" dirty="0">
                 <a:solidFill>
                   <a:srgbClr val="0F3D5E"/>
                 </a:solidFill>
               </a:rPr>
-              <a:t>Limpieza</a:t>
+              <a:t>Conceptos básicos de NLP</a:t>
             </a:r>
           </a:p>
         </p:txBody>
@@ -1438,7 +1901,7 @@
         </p:nvSpPr>
         <p:spPr>
           <a:xfrm>
-            <a:off x="609600" y="1447800"/>
+            <a:off x="609600" y="1943100"/>
             <a:ext cx="1066800" cy="50800"/>
           </a:xfrm>
           <a:prstGeom prst="rect">
@@ -1460,8 +1923,8 @@
         </p:nvSpPr>
         <p:spPr>
           <a:xfrm>
-            <a:off x="609600" y="1676400"/>
-            <a:ext cx="7315200" cy="4419600"/>
+            <a:off x="609600" y="2095500"/>
+            <a:ext cx="7315200" cy="4000500"/>
           </a:xfrm>
           <a:prstGeom prst="rect">
             <a:avLst/>
@@ -1485,32 +1948,68 @@
               <a:buChar char="•"/>
             </a:pPr>
             <a:r>
+              <a:rPr lang="es-CL" sz="2400" b="1" dirty="0">
+                <a:solidFill>
+                  <a:srgbClr val="1F2937"/>
+                </a:solidFill>
+              </a:rPr>
+              <a:t>Token</a:t>
+            </a:r>
+            <a:r>
               <a:rPr lang="es-CL" sz="2400" dirty="0">
                 <a:solidFill>
                   <a:srgbClr val="1F2937"/>
                 </a:solidFill>
               </a:rPr>
-              <a:t>Quitar HTML, caracteres especiales, firmas y ruido; reemplazar correos y enlaces por marcas.</a:t>
-            </a:r>
-          </a:p>
-          <a:p>
-            <a:pPr marL="342900" indent="-342900">
-              <a:spcBef>
-                <a:spcPts val="900"/>
-              </a:spcBef>
-              <a:buClr>
-                <a:srgbClr val="0E7490"/>
-              </a:buClr>
-              <a:buFont typeface="Arial"/>
-              <a:buChar char="•"/>
-            </a:pPr>
+              <a:t> (unidad que procesa el modelo), palabra, </a:t>
+            </a:r>
+            <a:r>
+              <a:rPr lang="es-CL" sz="2400" b="1" dirty="0">
+                <a:solidFill>
+                  <a:srgbClr val="1F2937"/>
+                </a:solidFill>
+              </a:rPr>
+              <a:t>lema</a:t>
+            </a:r>
             <a:r>
               <a:rPr lang="es-CL" sz="2400" dirty="0">
                 <a:solidFill>
                   <a:srgbClr val="1F2937"/>
                 </a:solidFill>
               </a:rPr>
-              <a:t>Cuidado con no borrar el problema que reporta el ticket.</a:t>
+              <a:t> (forma de diccionario), </a:t>
+            </a:r>
+            <a:r>
+              <a:rPr lang="es-CL" sz="2400" b="1" dirty="0">
+                <a:solidFill>
+                  <a:srgbClr val="1F2937"/>
+                </a:solidFill>
+              </a:rPr>
+              <a:t>stopwords</a:t>
+            </a:r>
+            <a:r>
+              <a:rPr lang="es-CL" sz="2400" dirty="0">
+                <a:solidFill>
+                  <a:srgbClr val="1F2937"/>
+                </a:solidFill>
+              </a:rPr>
+              <a:t> (palabras frecuentes con poco contenido), </a:t>
+            </a:r>
+            <a:r>
+              <a:rPr lang="es-CL" sz="2400" b="1" dirty="0">
+                <a:solidFill>
+                  <a:srgbClr val="1F2937"/>
+                </a:solidFill>
+              </a:rPr>
+              <a:t>n-gramas</a:t>
+            </a:r>
+            <a:r>
+              <a:rPr lang="es-CL" sz="2400" dirty="0">
+                <a:solidFill>
+                  <a:srgbClr val="1F2937"/>
+                </a:solidFill>
+              </a:rPr>
+              <a:t> (secuencias de n tokens).</a:t>
             </a:r>
           </a:p>
         </p:txBody>
@@ -1543,7 +2042,7 @@
                   <a:srgbClr val="6B7280"/>
                 </a:solidFill>
               </a:rPr>
-              <a:t>PF1822 · Módulo 2 · Cápsula 4 · AE4</a:t>
+              <a:t>PF1822 · Módulo 2 · Cápsula 4 · Aprendizaje esperado 4</a:t>
             </a:r>
           </a:p>
         </p:txBody>
@@ -1597,14 +2096,57 @@
       </p:sp>
       <p:sp>
         <p:nvSpPr>
+          <p:cNvPr id="7" name="Etiqueta"/>
+          <p:cNvSpPr txBox="1"/>
+          <p:nvPr/>
+        </p:nvSpPr>
+        <p:spPr>
+          <a:xfrm>
+            <a:off x="609600" y="228600"/>
+            <a:ext cx="7315200" cy="914400"/>
+          </a:xfrm>
+          <a:prstGeom prst="rect">
+            <a:avLst/>
+          </a:prstGeom>
+          <a:noFill/>
+        </p:spPr>
+        <p:txBody>
+          <a:bodyPr wrap="square" lIns="0" rIns="0" anchor="b">
+            <a:normAutofit/>
+          </a:bodyPr>
+          <a:lstStyle/>
+          <a:p>
+            <a:r>
+              <a:rPr lang="es-CL" sz="1200" b="1" dirty="0">
+                <a:solidFill>
+                  <a:srgbClr val="0E7490"/>
+                </a:solidFill>
+              </a:rPr>
+              <a:t>CONTENIDO DEL PLAN (TEXTUAL)</a:t>
+            </a:r>
+          </a:p>
+          <a:p>
+            <a:r>
+              <a:rPr lang="es-CL" sz="1200" b="1" dirty="0">
+                <a:solidFill>
+                  <a:srgbClr val="0F3D5E"/>
+                </a:solidFill>
+              </a:rPr>
+              <a:t>TÉCNICAS DE LIMPIEZA: ELIMINACIÓN DE CARACTERES ESPECIALES, HTML Y RUIDO.</a:t>
+            </a:r>
+          </a:p>
+        </p:txBody>
+      </p:sp>
+      <p:sp>
+        <p:nvSpPr>
           <p:cNvPr id="3" name="Título"/>
           <p:cNvSpPr txBox="1"/>
           <p:nvPr/>
         </p:nvSpPr>
         <p:spPr>
           <a:xfrm>
-            <a:off x="609600" y="381000"/>
-            <a:ext cx="7315200" cy="990600"/>
+            <a:off x="609600" y="1181100"/>
+            <a:ext cx="7315200" cy="685800"/>
           </a:xfrm>
           <a:prstGeom prst="rect">
             <a:avLst/>
@@ -1618,12 +2160,12 @@
           <a:lstStyle/>
           <a:p>
             <a:r>
-              <a:rPr lang="es-CL" sz="3200" b="1" dirty="0">
+              <a:rPr lang="es-CL" sz="2800" b="1" dirty="0">
                 <a:solidFill>
                   <a:srgbClr val="0F3D5E"/>
                 </a:solidFill>
               </a:rPr>
-              <a:t>Normalización</a:t>
+              <a:t>Limpieza</a:t>
             </a:r>
           </a:p>
         </p:txBody>
@@ -1636,7 +2178,7 @@
         </p:nvSpPr>
         <p:spPr>
           <a:xfrm>
-            <a:off x="609600" y="1447800"/>
+            <a:off x="609600" y="1943100"/>
             <a:ext cx="1066800" cy="50800"/>
           </a:xfrm>
           <a:prstGeom prst="rect">
@@ -1658,8 +2200,8 @@
         </p:nvSpPr>
         <p:spPr>
           <a:xfrm>
-            <a:off x="609600" y="1676400"/>
-            <a:ext cx="7315200" cy="4419600"/>
+            <a:off x="609600" y="2095500"/>
+            <a:ext cx="7315200" cy="4000500"/>
           </a:xfrm>
           <a:prstGeom prst="rect">
             <a:avLst/>
@@ -1688,7 +2230,27 @@
                   <a:srgbClr val="1F2937"/>
                 </a:solidFill>
               </a:rPr>
-              <a:t>Mayúsculas y minúsculas, espacios, estandarización de texto; tildes solo para comparar al medir.</a:t>
+              <a:t>Quitar HTML, caracteres especiales, firmas y ruido; reemplazar correos y enlaces por marcas.</a:t>
+            </a:r>
+          </a:p>
+          <a:p>
+            <a:pPr marL="342900" indent="-342900">
+              <a:spcBef>
+                <a:spcPts val="900"/>
+              </a:spcBef>
+              <a:buClr>
+                <a:srgbClr val="0E7490"/>
+              </a:buClr>
+              <a:buFont typeface="Arial"/>
+              <a:buChar char="•"/>
+            </a:pPr>
+            <a:r>
+              <a:rPr lang="es-CL" sz="2400" dirty="0">
+                <a:solidFill>
+                  <a:srgbClr val="1F2937"/>
+                </a:solidFill>
+              </a:rPr>
+              <a:t>Cuidado con no borrar el problema que reporta el ticket.</a:t>
             </a:r>
           </a:p>
         </p:txBody>
@@ -1721,7 +2283,7 @@
                   <a:srgbClr val="6B7280"/>
                 </a:solidFill>
               </a:rPr>
-              <a:t>PF1822 · Módulo 2 · Cápsula 4 · AE4</a:t>
+              <a:t>PF1822 · Módulo 2 · Cápsula 4 · Aprendizaje esperado 4</a:t>
             </a:r>
           </a:p>
         </p:txBody>
@@ -1775,14 +2337,57 @@
       </p:sp>
       <p:sp>
         <p:nvSpPr>
+          <p:cNvPr id="7" name="Etiqueta"/>
+          <p:cNvSpPr txBox="1"/>
+          <p:nvPr/>
+        </p:nvSpPr>
+        <p:spPr>
+          <a:xfrm>
+            <a:off x="609600" y="228600"/>
+            <a:ext cx="7315200" cy="914400"/>
+          </a:xfrm>
+          <a:prstGeom prst="rect">
+            <a:avLst/>
+          </a:prstGeom>
+          <a:noFill/>
+        </p:spPr>
+        <p:txBody>
+          <a:bodyPr wrap="square" lIns="0" rIns="0" anchor="b">
+            <a:normAutofit/>
+          </a:bodyPr>
+          <a:lstStyle/>
+          <a:p>
+            <a:r>
+              <a:rPr lang="es-CL" sz="1200" b="1" dirty="0">
+                <a:solidFill>
+                  <a:srgbClr val="0E7490"/>
+                </a:solidFill>
+              </a:rPr>
+              <a:t>CONTENIDO DEL PLAN (TEXTUAL)</a:t>
+            </a:r>
+          </a:p>
+          <a:p>
+            <a:r>
+              <a:rPr lang="es-CL" sz="1200" b="1" dirty="0">
+                <a:solidFill>
+                  <a:srgbClr val="0F3D5E"/>
+                </a:solidFill>
+              </a:rPr>
+              <a:t>NORMALIZACIÓN DE MAYÚSCULAS, MINÚSCULAS Y ESTANDARIZACIÓN DE TEXTO.</a:t>
+            </a:r>
+          </a:p>
+        </p:txBody>
+      </p:sp>
+      <p:sp>
+        <p:nvSpPr>
           <p:cNvPr id="3" name="Título"/>
           <p:cNvSpPr txBox="1"/>
           <p:nvPr/>
         </p:nvSpPr>
         <p:spPr>
           <a:xfrm>
-            <a:off x="609600" y="381000"/>
-            <a:ext cx="7315200" cy="990600"/>
+            <a:off x="609600" y="1181100"/>
+            <a:ext cx="7315200" cy="685800"/>
           </a:xfrm>
           <a:prstGeom prst="rect">
             <a:avLst/>
@@ -1796,12 +2401,12 @@
           <a:lstStyle/>
           <a:p>
             <a:r>
-              <a:rPr lang="es-CL" sz="3200" b="1" dirty="0">
+              <a:rPr lang="es-CL" sz="2800" b="1" dirty="0">
                 <a:solidFill>
                   <a:srgbClr val="0F3D5E"/>
                 </a:solidFill>
               </a:rPr>
-              <a:t>Tokenizar, lematizar, stemming</a:t>
+              <a:t>Normalización</a:t>
             </a:r>
           </a:p>
         </p:txBody>
@@ -1814,7 +2419,7 @@
         </p:nvSpPr>
         <p:spPr>
           <a:xfrm>
-            <a:off x="609600" y="1447800"/>
+            <a:off x="609600" y="1943100"/>
             <a:ext cx="1066800" cy="50800"/>
           </a:xfrm>
           <a:prstGeom prst="rect">
@@ -1836,8 +2441,8 @@
         </p:nvSpPr>
         <p:spPr>
           <a:xfrm>
-            <a:off x="609600" y="1676400"/>
-            <a:ext cx="7315200" cy="4419600"/>
+            <a:off x="609600" y="2095500"/>
+            <a:ext cx="7315200" cy="4000500"/>
           </a:xfrm>
           <a:prstGeom prst="rect">
             <a:avLst/>
@@ -1866,27 +2471,7 @@
                   <a:srgbClr val="1F2937"/>
                 </a:solidFill>
               </a:rPr>
-              <a:t>spaCy (es_core_news_sm) y NLTK.</a:t>
-            </a:r>
-          </a:p>
-          <a:p>
-            <a:pPr marL="342900" indent="-342900">
-              <a:spcBef>
-                <a:spcPts val="900"/>
-              </a:spcBef>
-              <a:buClr>
-                <a:srgbClr val="0E7490"/>
-              </a:buClr>
-              <a:buFont typeface="Arial"/>
-              <a:buChar char="•"/>
-            </a:pPr>
-            <a:r>
-              <a:rPr lang="es-CL" sz="2400" dirty="0">
-                <a:solidFill>
-                  <a:srgbClr val="1F2937"/>
-                </a:solidFill>
-              </a:rPr>
-              <a:t>Lematizar: "corriendo" → "correr"; stemming: recorta la raíz.</a:t>
+              <a:t>Mayúsculas y minúsculas, espacios, estandarización de texto; tildes solo para comparar al medir.</a:t>
             </a:r>
           </a:p>
         </p:txBody>
@@ -1919,7 +2504,7 @@
                   <a:srgbClr val="6B7280"/>
                 </a:solidFill>
               </a:rPr>
-              <a:t>PF1822 · Módulo 2 · Cápsula 4 · AE4</a:t>
+              <a:t>PF1822 · Módulo 2 · Cápsula 4 · Aprendizaje esperado 4</a:t>
             </a:r>
           </a:p>
         </p:txBody>
@@ -1973,14 +2558,67 @@
       </p:sp>
       <p:sp>
         <p:nvSpPr>
+          <p:cNvPr id="7" name="Etiqueta"/>
+          <p:cNvSpPr txBox="1"/>
+          <p:nvPr/>
+        </p:nvSpPr>
+        <p:spPr>
+          <a:xfrm>
+            <a:off x="609600" y="228600"/>
+            <a:ext cx="7315200" cy="914400"/>
+          </a:xfrm>
+          <a:prstGeom prst="rect">
+            <a:avLst/>
+          </a:prstGeom>
+          <a:noFill/>
+        </p:spPr>
+        <p:txBody>
+          <a:bodyPr wrap="square" lIns="0" rIns="0" anchor="b">
+            <a:normAutofit/>
+          </a:bodyPr>
+          <a:lstStyle/>
+          <a:p>
+            <a:r>
+              <a:rPr lang="es-CL" sz="1200" b="1" dirty="0">
+                <a:solidFill>
+                  <a:srgbClr val="0E7490"/>
+                </a:solidFill>
+              </a:rPr>
+              <a:t>CONTENIDO DEL PLAN (TEXTUAL)</a:t>
+            </a:r>
+          </a:p>
+          <a:p>
+            <a:r>
+              <a:rPr lang="es-CL" sz="1200" b="1" dirty="0">
+                <a:solidFill>
+                  <a:srgbClr val="0F3D5E"/>
+                </a:solidFill>
+              </a:rPr>
+              <a:t>TOKENIZACIÓN Y NORMALIZACIÓN CON LIBRERÍAS COMO SPACY O NLTK.</a:t>
+            </a:r>
+          </a:p>
+          <a:p>
+            <a:r>
+              <a:rPr lang="es-CL" sz="1200" b="1" dirty="0">
+                <a:solidFill>
+                  <a:srgbClr val="0F3D5E"/>
+                </a:solidFill>
+              </a:rPr>
+              <a:t>LEMATIZACIÓN Y STEMMING.</a:t>
+            </a:r>
+          </a:p>
+        </p:txBody>
+      </p:sp>
+      <p:sp>
+        <p:nvSpPr>
           <p:cNvPr id="3" name="Título"/>
           <p:cNvSpPr txBox="1"/>
           <p:nvPr/>
         </p:nvSpPr>
         <p:spPr>
           <a:xfrm>
-            <a:off x="609600" y="381000"/>
-            <a:ext cx="7315200" cy="990600"/>
+            <a:off x="609600" y="1181100"/>
+            <a:ext cx="7315200" cy="685800"/>
           </a:xfrm>
           <a:prstGeom prst="rect">
             <a:avLst/>
@@ -1994,12 +2632,12 @@
           <a:lstStyle/>
           <a:p>
             <a:r>
-              <a:rPr lang="es-CL" sz="3200" b="1" dirty="0">
+              <a:rPr lang="es-CL" sz="2800" b="1" dirty="0">
                 <a:solidFill>
                   <a:srgbClr val="0F3D5E"/>
                 </a:solidFill>
               </a:rPr>
-              <a:t>Vectorización básica</a:t>
+              <a:t>Tokenizar, lematizar, stemming</a:t>
             </a:r>
           </a:p>
         </p:txBody>
@@ -2012,7 +2650,7 @@
         </p:nvSpPr>
         <p:spPr>
           <a:xfrm>
-            <a:off x="609600" y="1447800"/>
+            <a:off x="609600" y="1943100"/>
             <a:ext cx="1066800" cy="50800"/>
           </a:xfrm>
           <a:prstGeom prst="rect">
@@ -2034,8 +2672,8 @@
         </p:nvSpPr>
         <p:spPr>
           <a:xfrm>
-            <a:off x="609600" y="1676400"/>
-            <a:ext cx="7315200" cy="4419600"/>
+            <a:off x="609600" y="2095500"/>
+            <a:ext cx="7315200" cy="4000500"/>
           </a:xfrm>
           <a:prstGeom prst="rect">
             <a:avLst/>
@@ -2064,7 +2702,27 @@
                   <a:srgbClr val="1F2937"/>
                 </a:solidFill>
               </a:rPr>
-              <a:t>CountVectorizer y TF-IDF de scikit-learn: representar textos como números para compararlos.</a:t>
+              <a:t>spaCy (es_core_news_sm) y NLTK.</a:t>
+            </a:r>
+          </a:p>
+          <a:p>
+            <a:pPr marL="342900" indent="-342900">
+              <a:spcBef>
+                <a:spcPts val="900"/>
+              </a:spcBef>
+              <a:buClr>
+                <a:srgbClr val="0E7490"/>
+              </a:buClr>
+              <a:buFont typeface="Arial"/>
+              <a:buChar char="•"/>
+            </a:pPr>
+            <a:r>
+              <a:rPr lang="es-CL" sz="2400" dirty="0">
+                <a:solidFill>
+                  <a:srgbClr val="1F2937"/>
+                </a:solidFill>
+              </a:rPr>
+              <a:t>Lematizar: "corriendo" → "correr"; stemming: recorta la raíz.</a:t>
             </a:r>
           </a:p>
         </p:txBody>
@@ -2097,7 +2755,7 @@
                   <a:srgbClr val="6B7280"/>
                 </a:solidFill>
               </a:rPr>
-              <a:t>PF1822 · Módulo 2 · Cápsula 4 · AE4</a:t>
+              <a:t>PF1822 · Módulo 2 · Cápsula 4 · Aprendizaje esperado 4</a:t>
             </a:r>
           </a:p>
         </p:txBody>
@@ -2151,14 +2809,57 @@
       </p:sp>
       <p:sp>
         <p:nvSpPr>
+          <p:cNvPr id="7" name="Etiqueta"/>
+          <p:cNvSpPr txBox="1"/>
+          <p:nvPr/>
+        </p:nvSpPr>
+        <p:spPr>
+          <a:xfrm>
+            <a:off x="609600" y="228600"/>
+            <a:ext cx="7315200" cy="914400"/>
+          </a:xfrm>
+          <a:prstGeom prst="rect">
+            <a:avLst/>
+          </a:prstGeom>
+          <a:noFill/>
+        </p:spPr>
+        <p:txBody>
+          <a:bodyPr wrap="square" lIns="0" rIns="0" anchor="b">
+            <a:normAutofit/>
+          </a:bodyPr>
+          <a:lstStyle/>
+          <a:p>
+            <a:r>
+              <a:rPr lang="es-CL" sz="1200" b="1" dirty="0">
+                <a:solidFill>
+                  <a:srgbClr val="0E7490"/>
+                </a:solidFill>
+              </a:rPr>
+              <a:t>CONTENIDO DEL PLAN (TEXTUAL)</a:t>
+            </a:r>
+          </a:p>
+          <a:p>
+            <a:r>
+              <a:rPr lang="es-CL" sz="1200" b="1" dirty="0">
+                <a:solidFill>
+                  <a:srgbClr val="0F3D5E"/>
+                </a:solidFill>
+              </a:rPr>
+              <a:t>VECTORIZACIÓN BÁSICA: COUNTVECTORIZER Y TF-IDF.</a:t>
+            </a:r>
+          </a:p>
+        </p:txBody>
+      </p:sp>
+      <p:sp>
+        <p:nvSpPr>
           <p:cNvPr id="3" name="Título"/>
           <p:cNvSpPr txBox="1"/>
           <p:nvPr/>
         </p:nvSpPr>
         <p:spPr>
           <a:xfrm>
-            <a:off x="609600" y="381000"/>
-            <a:ext cx="7315200" cy="990600"/>
+            <a:off x="609600" y="1181100"/>
+            <a:ext cx="7315200" cy="685800"/>
           </a:xfrm>
           <a:prstGeom prst="rect">
             <a:avLst/>
@@ -2172,12 +2873,12 @@
           <a:lstStyle/>
           <a:p>
             <a:r>
-              <a:rPr lang="es-CL" sz="3200" b="1" dirty="0">
+              <a:rPr lang="es-CL" sz="2800" b="1" dirty="0">
                 <a:solidFill>
                   <a:srgbClr val="0F3D5E"/>
                 </a:solidFill>
               </a:rPr>
-              <a:t>Un pipeline modular</a:t>
+              <a:t>Vectorización básica</a:t>
             </a:r>
           </a:p>
         </p:txBody>
@@ -2190,7 +2891,7 @@
         </p:nvSpPr>
         <p:spPr>
           <a:xfrm>
-            <a:off x="609600" y="1447800"/>
+            <a:off x="609600" y="1943100"/>
             <a:ext cx="1066800" cy="50800"/>
           </a:xfrm>
           <a:prstGeom prst="rect">
@@ -2212,8 +2913,8 @@
         </p:nvSpPr>
         <p:spPr>
           <a:xfrm>
-            <a:off x="609600" y="1676400"/>
-            <a:ext cx="7315200" cy="4419600"/>
+            <a:off x="609600" y="2095500"/>
+            <a:ext cx="7315200" cy="4000500"/>
           </a:xfrm>
           <a:prstGeom prst="rect">
             <a:avLst/>
@@ -2242,7 +2943,7 @@
                   <a:srgbClr val="1F2937"/>
                 </a:solidFill>
               </a:rPr>
-              <a:t>Funciones reutilizables por etapa (limpiar, tokenizar, ngramas, medir) que se encadenan y se prueban por separado.</a:t>
+              <a:t>CountVectorizer y TF-IDF de scikit-learn: representar textos como números para compararlos.</a:t>
             </a:r>
           </a:p>
         </p:txBody>
@@ -2275,7 +2976,7 @@
                   <a:srgbClr val="6B7280"/>
                 </a:solidFill>
               </a:rPr>
-              <a:t>PF1822 · Módulo 2 · Cápsula 4 · AE4</a:t>
+              <a:t>PF1822 · Módulo 2 · Cápsula 4 · Aprendizaje esperado 4</a:t>
             </a:r>
           </a:p>
         </p:txBody>
@@ -2329,14 +3030,67 @@
       </p:sp>
       <p:sp>
         <p:nvSpPr>
+          <p:cNvPr id="7" name="Etiqueta"/>
+          <p:cNvSpPr txBox="1"/>
+          <p:nvPr/>
+        </p:nvSpPr>
+        <p:spPr>
+          <a:xfrm>
+            <a:off x="609600" y="228600"/>
+            <a:ext cx="7315200" cy="914400"/>
+          </a:xfrm>
+          <a:prstGeom prst="rect">
+            <a:avLst/>
+          </a:prstGeom>
+          <a:noFill/>
+        </p:spPr>
+        <p:txBody>
+          <a:bodyPr wrap="square" lIns="0" rIns="0" anchor="b">
+            <a:normAutofit/>
+          </a:bodyPr>
+          <a:lstStyle/>
+          <a:p>
+            <a:r>
+              <a:rPr lang="es-CL" sz="1200" b="1" dirty="0">
+                <a:solidFill>
+                  <a:srgbClr val="0E7490"/>
+                </a:solidFill>
+              </a:rPr>
+              <a:t>CONTENIDO DEL PLAN (TEXTUAL)</a:t>
+            </a:r>
+          </a:p>
+          <a:p>
+            <a:r>
+              <a:rPr lang="es-CL" sz="1200" b="1" dirty="0">
+                <a:solidFill>
+                  <a:srgbClr val="0F3D5E"/>
+                </a:solidFill>
+              </a:rPr>
+              <a:t>ESTRUCTURA MODULAR DE UN PIPELINE DE PREPROCESAMIENTO.</a:t>
+            </a:r>
+          </a:p>
+          <a:p>
+            <a:r>
+              <a:rPr lang="es-CL" sz="1200" b="1" dirty="0">
+                <a:solidFill>
+                  <a:srgbClr val="0F3D5E"/>
+                </a:solidFill>
+              </a:rPr>
+              <a:t>FUNCIONES REUTILIZABLES PARA CADA ETAPA.</a:t>
+            </a:r>
+          </a:p>
+        </p:txBody>
+      </p:sp>
+      <p:sp>
+        <p:nvSpPr>
           <p:cNvPr id="3" name="Título"/>
           <p:cNvSpPr txBox="1"/>
           <p:nvPr/>
         </p:nvSpPr>
         <p:spPr>
           <a:xfrm>
-            <a:off x="609600" y="381000"/>
-            <a:ext cx="7315200" cy="990600"/>
+            <a:off x="609600" y="1181100"/>
+            <a:ext cx="7315200" cy="685800"/>
           </a:xfrm>
           <a:prstGeom prst="rect">
             <a:avLst/>
@@ -2350,12 +3104,12 @@
           <a:lstStyle/>
           <a:p>
             <a:r>
-              <a:rPr lang="es-CL" sz="3200" b="1" dirty="0">
+              <a:rPr lang="es-CL" sz="2800" b="1" dirty="0">
                 <a:solidFill>
                   <a:srgbClr val="0F3D5E"/>
                 </a:solidFill>
               </a:rPr>
-              <a:t>Métricas de calidad</a:t>
+              <a:t>Un pipeline modular</a:t>
             </a:r>
           </a:p>
         </p:txBody>
@@ -2368,7 +3122,7 @@
         </p:nvSpPr>
         <p:spPr>
           <a:xfrm>
-            <a:off x="609600" y="1447800"/>
+            <a:off x="609600" y="1943100"/>
             <a:ext cx="1066800" cy="50800"/>
           </a:xfrm>
           <a:prstGeom prst="rect">
@@ -2390,8 +3144,8 @@
         </p:nvSpPr>
         <p:spPr>
           <a:xfrm>
-            <a:off x="609600" y="1676400"/>
-            <a:ext cx="7315200" cy="4419600"/>
+            <a:off x="609600" y="2095500"/>
+            <a:ext cx="7315200" cy="4000500"/>
           </a:xfrm>
           <a:prstGeom prst="rect">
             <a:avLst/>
@@ -2415,88 +3169,12 @@
               <a:buChar char="•"/>
             </a:pPr>
             <a:r>
-              <a:rPr lang="es-CL" sz="2000" b="1" dirty="0">
+              <a:rPr lang="es-CL" sz="2400" dirty="0">
                 <a:solidFill>
                   <a:srgbClr val="1F2937"/>
                 </a:solidFill>
               </a:rPr>
-              <a:t>ROUGE</a:t>
-            </a:r>
-            <a:r>
-              <a:rPr lang="es-CL" sz="2000" dirty="0">
-                <a:solidFill>
-                  <a:srgbClr val="1F2937"/>
-                </a:solidFill>
-              </a:rPr>
-              <a:t> (cuánto de la referencia aparece en el resumen), </a:t>
-            </a:r>
-            <a:r>
-              <a:rPr lang="es-CL" sz="2000" b="1" dirty="0">
-                <a:solidFill>
-                  <a:srgbClr val="1F2937"/>
-                </a:solidFill>
-              </a:rPr>
-              <a:t>BLEU</a:t>
-            </a:r>
-            <a:r>
-              <a:rPr lang="es-CL" sz="2000" dirty="0">
-                <a:solidFill>
-                  <a:srgbClr val="1F2937"/>
-                </a:solidFill>
-              </a:rPr>
-              <a:t> (cuánto del resumen aparece en la referencia, con penalización por largo), </a:t>
-            </a:r>
-            <a:r>
-              <a:rPr lang="es-CL" sz="2000" b="1" dirty="0">
-                <a:solidFill>
-                  <a:srgbClr val="1F2937"/>
-                </a:solidFill>
-              </a:rPr>
-              <a:t>coherencia</a:t>
-            </a:r>
-            <a:r>
-              <a:rPr lang="es-CL" sz="2000" dirty="0">
-                <a:solidFill>
-                  <a:srgbClr val="1F2937"/>
-                </a:solidFill>
-              </a:rPr>
-              <a:t> y </a:t>
-            </a:r>
-            <a:r>
-              <a:rPr lang="es-CL" sz="2000" b="1" dirty="0">
-                <a:solidFill>
-                  <a:srgbClr val="1F2937"/>
-                </a:solidFill>
-              </a:rPr>
-              <a:t>relevancia</a:t>
-            </a:r>
-            <a:r>
-              <a:rPr lang="es-CL" sz="2000" dirty="0">
-                <a:solidFill>
-                  <a:srgbClr val="1F2937"/>
-                </a:solidFill>
-              </a:rPr>
-              <a:t> con pauta humana.</a:t>
-            </a:r>
-          </a:p>
-          <a:p>
-            <a:pPr marL="342900" indent="-342900">
-              <a:spcBef>
-                <a:spcPts val="900"/>
-              </a:spcBef>
-              <a:buClr>
-                <a:srgbClr val="0E7490"/>
-              </a:buClr>
-              <a:buFont typeface="Arial"/>
-              <a:buChar char="•"/>
-            </a:pPr>
-            <a:r>
-              <a:rPr lang="es-CL" sz="2000" dirty="0">
-                <a:solidFill>
-                  <a:srgbClr val="1F2937"/>
-                </a:solidFill>
-              </a:rPr>
-              <a:t>En español, usar un tokenizador que respete las tildes.</a:t>
+              <a:t>Funciones reutilizables por etapa (limpiar, tokenizar, ngramas, medir) que se encadenan y se prueban por separado.</a:t>
             </a:r>
           </a:p>
         </p:txBody>
@@ -2529,7 +3207,7 @@
                   <a:srgbClr val="6B7280"/>
                 </a:solidFill>
               </a:rPr>
-              <a:t>PF1822 · Módulo 2 · Cápsula 4 · AE4</a:t>
+              <a:t>PF1822 · Módulo 2 · Cápsula 4 · Aprendizaje esperado 4</a:t>
             </a:r>
           </a:p>
         </p:txBody>
@@ -2583,14 +3261,57 @@
       </p:sp>
       <p:sp>
         <p:nvSpPr>
+          <p:cNvPr id="7" name="Etiqueta"/>
+          <p:cNvSpPr txBox="1"/>
+          <p:nvPr/>
+        </p:nvSpPr>
+        <p:spPr>
+          <a:xfrm>
+            <a:off x="609600" y="228600"/>
+            <a:ext cx="7315200" cy="914400"/>
+          </a:xfrm>
+          <a:prstGeom prst="rect">
+            <a:avLst/>
+          </a:prstGeom>
+          <a:noFill/>
+        </p:spPr>
+        <p:txBody>
+          <a:bodyPr wrap="square" lIns="0" rIns="0" anchor="b">
+            <a:normAutofit/>
+          </a:bodyPr>
+          <a:lstStyle/>
+          <a:p>
+            <a:r>
+              <a:rPr lang="es-CL" sz="1200" b="1" dirty="0">
+                <a:solidFill>
+                  <a:srgbClr val="0E7490"/>
+                </a:solidFill>
+              </a:rPr>
+              <a:t>CONTENIDO DEL PLAN (TEXTUAL)</a:t>
+            </a:r>
+          </a:p>
+          <a:p>
+            <a:r>
+              <a:rPr lang="es-CL" sz="1200" b="1" dirty="0">
+                <a:solidFill>
+                  <a:srgbClr val="0F3D5E"/>
+                </a:solidFill>
+              </a:rPr>
+              <a:t>MÉTRICAS BÁSICAS DE CALIDAD DE RESPUESTAS: COHERENCIA, RELEVANCIA, BLEU Y ROUGE.</a:t>
+            </a:r>
+          </a:p>
+        </p:txBody>
+      </p:sp>
+      <p:sp>
+        <p:nvSpPr>
           <p:cNvPr id="3" name="Título"/>
           <p:cNvSpPr txBox="1"/>
           <p:nvPr/>
         </p:nvSpPr>
         <p:spPr>
           <a:xfrm>
-            <a:off x="609600" y="381000"/>
-            <a:ext cx="7315200" cy="990600"/>
+            <a:off x="609600" y="1181100"/>
+            <a:ext cx="7315200" cy="685800"/>
           </a:xfrm>
           <a:prstGeom prst="rect">
             <a:avLst/>
@@ -2604,12 +3325,12 @@
           <a:lstStyle/>
           <a:p>
             <a:r>
-              <a:rPr lang="es-CL" sz="3200" b="1" dirty="0">
+              <a:rPr lang="es-CL" sz="2800" b="1" dirty="0">
                 <a:solidFill>
                   <a:srgbClr val="0F3D5E"/>
                 </a:solidFill>
               </a:rPr>
-              <a:t>Registrar y ajustar</a:t>
+              <a:t>Métricas de calidad</a:t>
             </a:r>
           </a:p>
         </p:txBody>
@@ -2622,7 +3343,7 @@
         </p:nvSpPr>
         <p:spPr>
           <a:xfrm>
-            <a:off x="609600" y="1447800"/>
+            <a:off x="609600" y="1943100"/>
             <a:ext cx="1066800" cy="50800"/>
           </a:xfrm>
           <a:prstGeom prst="rect">
@@ -2644,8 +3365,8 @@
         </p:nvSpPr>
         <p:spPr>
           <a:xfrm>
-            <a:off x="609600" y="1676400"/>
-            <a:ext cx="7315200" cy="4419600"/>
+            <a:off x="609600" y="2095500"/>
+            <a:ext cx="7315200" cy="4000500"/>
           </a:xfrm>
           <a:prstGeom prst="rect">
             <a:avLst/>
@@ -2669,12 +3390,88 @@
               <a:buChar char="•"/>
             </a:pPr>
             <a:r>
-              <a:rPr lang="es-CL" sz="2400" dirty="0">
+              <a:rPr lang="es-CL" sz="2000" b="1" dirty="0">
                 <a:solidFill>
                   <a:srgbClr val="1F2937"/>
                 </a:solidFill>
               </a:rPr>
-              <a:t>Una fila por prueba en un CSV; identificar ajustes a partir de los números.</a:t>
+              <a:t>ROUGE</a:t>
+            </a:r>
+            <a:r>
+              <a:rPr lang="es-CL" sz="2000" dirty="0">
+                <a:solidFill>
+                  <a:srgbClr val="1F2937"/>
+                </a:solidFill>
+              </a:rPr>
+              <a:t> (cuánto de la referencia aparece en el resumen), </a:t>
+            </a:r>
+            <a:r>
+              <a:rPr lang="es-CL" sz="2000" b="1" dirty="0">
+                <a:solidFill>
+                  <a:srgbClr val="1F2937"/>
+                </a:solidFill>
+              </a:rPr>
+              <a:t>BLEU</a:t>
+            </a:r>
+            <a:r>
+              <a:rPr lang="es-CL" sz="2000" dirty="0">
+                <a:solidFill>
+                  <a:srgbClr val="1F2937"/>
+                </a:solidFill>
+              </a:rPr>
+              <a:t> (cuánto del resumen aparece en la referencia, con penalización por largo), </a:t>
+            </a:r>
+            <a:r>
+              <a:rPr lang="es-CL" sz="2000" b="1" dirty="0">
+                <a:solidFill>
+                  <a:srgbClr val="1F2937"/>
+                </a:solidFill>
+              </a:rPr>
+              <a:t>coherencia</a:t>
+            </a:r>
+            <a:r>
+              <a:rPr lang="es-CL" sz="2000" dirty="0">
+                <a:solidFill>
+                  <a:srgbClr val="1F2937"/>
+                </a:solidFill>
+              </a:rPr>
+              <a:t> y </a:t>
+            </a:r>
+            <a:r>
+              <a:rPr lang="es-CL" sz="2000" b="1" dirty="0">
+                <a:solidFill>
+                  <a:srgbClr val="1F2937"/>
+                </a:solidFill>
+              </a:rPr>
+              <a:t>relevancia</a:t>
+            </a:r>
+            <a:r>
+              <a:rPr lang="es-CL" sz="2000" dirty="0">
+                <a:solidFill>
+                  <a:srgbClr val="1F2937"/>
+                </a:solidFill>
+              </a:rPr>
+              <a:t> con pauta humana.</a:t>
+            </a:r>
+          </a:p>
+          <a:p>
+            <a:pPr marL="342900" indent="-342900">
+              <a:spcBef>
+                <a:spcPts val="900"/>
+              </a:spcBef>
+              <a:buClr>
+                <a:srgbClr val="0E7490"/>
+              </a:buClr>
+              <a:buFont typeface="Arial"/>
+              <a:buChar char="•"/>
+            </a:pPr>
+            <a:r>
+              <a:rPr lang="es-CL" sz="2000" dirty="0">
+                <a:solidFill>
+                  <a:srgbClr val="1F2937"/>
+                </a:solidFill>
+              </a:rPr>
+              <a:t>En español, usar un tokenizador que respete las tildes.</a:t>
             </a:r>
           </a:p>
         </p:txBody>
@@ -2707,7 +3504,7 @@
                   <a:srgbClr val="6B7280"/>
                 </a:solidFill>
               </a:rPr>
-              <a:t>PF1822 · Módulo 2 · Cápsula 4 · AE4</a:t>
+              <a:t>PF1822 · Módulo 2 · Cápsula 4 · Aprendizaje esperado 4</a:t>
             </a:r>
           </a:p>
         </p:txBody>
